--- a/public/fun/pack/pptx/familypro/가족소개프리미엄_21_우리부부_스카이펄.pptx
+++ b/public/fun/pack/pptx/familypro/가족소개프리미엄_21_우리부부_스카이펄.pptx
@@ -113,12 +113,12 @@
   <p:extLst>
     <p:ext uri="{521415D9-36F7-43E2-AB2F-B90AF26B5E84}">
       <p14:sectionLst xmlns:p14="http://schemas.microsoft.com/office/powerpoint/2010/main">
-        <p14:section name="시작" id="{90303EFD-0CE7-4976-9C77-62A6ABE5F754}">
+        <p14:section name="시작" id="{9C4A78B2-A0A6-4EB3-A8C7-C69A868B4951}">
           <p14:sldIdLst>
             <p14:sldId id="256"/>
           </p14:sldIdLst>
         </p14:section>
-        <p14:section name="본문" id="{8502453D-FB40-49EC-9E7D-56876E161424}">
+        <p14:section name="본문" id="{BC999899-194B-410F-BB93-A9EAFE9AD933}">
           <p14:sldIdLst>
             <p14:sldId id="257"/>
             <p14:sldId id="258"/>
@@ -127,7 +127,7 @@
             <p14:sldId id="261"/>
           </p14:sldIdLst>
         </p14:section>
-        <p14:section name="마무리" id="{F8BD8D63-2F3D-410B-902E-B88E7F9DC187}">
+        <p14:section name="마무리" id="{11AFB50F-20A9-4273-8F51-6507BD74193A}">
           <p14:sldIdLst>
             <p14:sldId id="262"/>
           </p14:sldIdLst>
@@ -1480,7 +1480,7 @@
             </a:lvl1pPr>
           </a:lstStyle>
           <a:p>
-            <a:fld id="{4E55FFFB-94A1-465E-9F0C-C9D559D1B975}" type="slidenum">
+            <a:fld id="{0C3C1C32-F7E1-4469-B9E7-5574D845F3BE}" type="slidenum">
               <a:rPr lang="en-US"/>
               <a:t>‹#›</a:t>
             </a:fld>
@@ -2093,7 +2093,7 @@
             </a:lvl1pPr>
           </a:lstStyle>
           <a:p>
-            <a:fld id="{5561F03D-6157-426E-A2CB-25029A6EE5EA}" type="slidenum">
+            <a:fld id="{52E65621-8F6A-47BD-8FEE-091B3A438CC0}" type="slidenum">
               <a:rPr lang="en-US"/>
               <a:t>‹#›</a:t>
             </a:fld>
@@ -2771,7 +2771,7 @@
             </a:lvl1pPr>
           </a:lstStyle>
           <a:p>
-            <a:fld id="{A77680E1-91D1-4B0F-B8DE-442A81CEAA58}" type="slidenum">
+            <a:fld id="{ACCBBE5E-D03B-4916-A8BE-17F108877986}" type="slidenum">
               <a:rPr lang="en-US"/>
               <a:t>‹#›</a:t>
             </a:fld>
@@ -3634,7 +3634,7 @@
           <a:p>
             <a:r>
               <a:rPr lang="ko-KR"/>
-              <a:t>우리 부부 · 0000. 00. 00</a:t>
+              <a:t>우리 부부 · 날짜 입력</a:t>
             </a:r>
           </a:p>
         </p:txBody>
@@ -3857,7 +3857,7 @@
           <a:bodyPr/>
           <a:lstStyle/>
           <a:p>
-            <a:fld id="{216256AF-7353-437A-8ED6-AEEDDA20A17F}" type="slidenum">
+            <a:fld id="{4BA29DB7-1EE9-40AB-9A9C-701986B8F713}" type="slidenum">
               <a:rPr lang="en-US"/>
               <a:t>‹#›</a:t>
             </a:fld>
@@ -4309,7 +4309,7 @@
           <a:bodyPr/>
           <a:lstStyle/>
           <a:p>
-            <a:fld id="{A9EA86DF-D851-4EF2-91C5-91A87B267468}" type="slidenum">
+            <a:fld id="{9BA54DC9-9253-4187-8AE3-0BA6AEA59931}" type="slidenum">
               <a:rPr lang="en-US"/>
               <a:t>‹#›</a:t>
             </a:fld>
@@ -5151,7 +5151,7 @@
           <a:bodyPr/>
           <a:lstStyle/>
           <a:p>
-            <a:fld id="{BCBAA88D-762E-4C29-BF6D-EC75000C4891}" type="slidenum">
+            <a:fld id="{15F31114-A56C-438F-9B27-D52D07ACE2CA}" type="slidenum">
               <a:rPr lang="en-US"/>
               <a:t>‹#›</a:t>
             </a:fld>
@@ -6499,7 +6499,7 @@
           <a:bodyPr/>
           <a:lstStyle/>
           <a:p>
-            <a:fld id="{D5CCE532-DA52-432B-B01B-C7BE3B83F508}" type="slidenum">
+            <a:fld id="{0BC77CC5-047B-4291-9350-A336DE247DFD}" type="slidenum">
               <a:rPr lang="en-US"/>
               <a:t>‹#›</a:t>
             </a:fld>
@@ -6587,7 +6587,7 @@
           <a:bodyPr/>
           <a:lstStyle/>
           <a:p>
-            <a:fld id="{6B20DBC7-00FE-4276-A057-3D5B5623E9D8}" type="slidenum">
+            <a:fld id="{E46A6DCE-6E90-47EA-9207-983A0262C1AB}" type="slidenum">
               <a:rPr lang="en-US"/>
               <a:t>‹#›</a:t>
             </a:fld>
